--- a/curriculum/M01/W05/L01/slides.pptx
+++ b/curriculum/M01/W05/L01/slides.pptx
@@ -12954,7 +12954,7 @@
               </a:spcAft>
             </a:pPr>
             <a:r>
-              <a:rPr sz="1800" b="1" i="0">
+              <a:rPr sz="1600" b="1" i="0">
                 <a:solidFill>
                   <a:srgbClr val="F2B705"/>
                 </a:solidFill>
@@ -12965,7 +12965,7 @@
               <a:t>•  </a:t>
             </a:r>
             <a:r>
-              <a:rPr sz="1800" b="1" i="0">
+              <a:rPr sz="1600" b="1" i="0">
                 <a:solidFill>
                   <a:srgbClr val="11202B"/>
                 </a:solidFill>
@@ -12976,7 +12976,7 @@
               <a:t>이 상태는 평형이 아니다.</a:t>
             </a:r>
             <a:r>
-              <a:rPr sz="1800" b="0" i="0">
+              <a:rPr sz="1600" b="0" i="0">
                 <a:solidFill>
                   <a:srgbClr val="11202B"/>
                 </a:solidFill>
@@ -12987,7 +12987,7 @@
               <a:t> 농도 차이를 유지하는 데 지속적으로 에너지가 든다. Na⁺/K⁺-ATPase 하나가 세포 전체 ATP 소비의 상당 부분을 쓰며, 신경 조직에서는 더 크다. </a:t>
             </a:r>
             <a:r>
-              <a:rPr sz="1800" b="1" i="0">
+              <a:rPr sz="1600" b="1" i="0">
                 <a:solidFill>
                   <a:srgbClr val="11202B"/>
                 </a:solidFill>
@@ -12998,7 +12998,7 @@
               <a:t>살아 있다는 것이 비평형 상태를 유지하는 일</a:t>
             </a:r>
             <a:r>
-              <a:rPr sz="1800" b="0" i="0">
+              <a:rPr sz="1600" b="0" i="0">
                 <a:solidFill>
                   <a:srgbClr val="11202B"/>
                 </a:solidFill>
@@ -13016,7 +13016,7 @@
               </a:spcAft>
             </a:pPr>
             <a:r>
-              <a:rPr sz="1800" b="1" i="0">
+              <a:rPr sz="1600" b="1" i="0">
                 <a:solidFill>
                   <a:srgbClr val="F2B705"/>
                 </a:solidFill>
@@ -13027,7 +13027,58 @@
               <a:t>•  </a:t>
             </a:r>
             <a:r>
-              <a:rPr sz="1800" b="1" i="0">
+              <a:rPr sz="1600" b="0" i="0">
+                <a:solidFill>
+                  <a:srgbClr val="11202B"/>
+                </a:solidFill>
+                <a:latin typeface="Malgun Gothic"/>
+                <a:ea typeface="Malgun Gothic"/>
+                <a:cs typeface="Malgun Gothic"/>
+              </a:rPr>
+              <a:t>이 기울기는 신호의 재료이기도 하다. 농도 차이가 클수록 통로가 열렸을 때 변화의 폭이 커지므로, 세포는 비싼 비용을 치르고 유지한 기울기를 </a:t>
+            </a:r>
+            <a:r>
+              <a:rPr sz="1600" b="1" i="0">
+                <a:solidFill>
+                  <a:srgbClr val="11202B"/>
+                </a:solidFill>
+                <a:latin typeface="Malgun Gothic"/>
+                <a:ea typeface="Malgun Gothic"/>
+                <a:cs typeface="Malgun Gothic"/>
+              </a:rPr>
+              <a:t>정보 전달에 재사용</a:t>
+            </a:r>
+            <a:r>
+              <a:rPr sz="1600" b="0" i="0">
+                <a:solidFill>
+                  <a:srgbClr val="11202B"/>
+                </a:solidFill>
+                <a:latin typeface="Malgun Gothic"/>
+                <a:ea typeface="Malgun Gothic"/>
+                <a:cs typeface="Malgun Gothic"/>
+              </a:rPr>
+              <a:t>한다. 에너지 저장과 신호 전달이 같은 장치에서 나온다.</a:t>
+            </a:r>
+          </a:p>
+          <a:p>
+            <a:pPr>
+              <a:spcAft>
+                <a:spcPts val="900"/>
+              </a:spcAft>
+            </a:pPr>
+            <a:r>
+              <a:rPr sz="1600" b="1" i="0">
+                <a:solidFill>
+                  <a:srgbClr val="F2B705"/>
+                </a:solidFill>
+                <a:latin typeface="Malgun Gothic"/>
+                <a:ea typeface="Malgun Gothic"/>
+                <a:cs typeface="Malgun Gothic"/>
+              </a:rPr>
+              <a:t>•  </a:t>
+            </a:r>
+            <a:r>
+              <a:rPr sz="1600" b="1" i="0">
                 <a:solidFill>
                   <a:srgbClr val="11202B"/>
                 </a:solidFill>
@@ -13038,7 +13089,7 @@
               <a:t>pH도 구획마다 다르다.</a:t>
             </a:r>
             <a:r>
-              <a:rPr sz="1800" b="0" i="0">
+              <a:rPr sz="1600" b="0" i="0">
                 <a:solidFill>
                   <a:srgbClr val="11202B"/>
                 </a:solidFill>
